--- a/decks/englang-rhetoric/englang-rhetoric_ch3_rhetorical-methods.pptx
+++ b/decks/englang-rhetoric/englang-rhetoric_ch3_rhetorical-methods.pptx
@@ -127,29 +127,29 @@
   <p:extLst>
     <p:ext uri="{521415D9-36F7-43E2-AB2F-B90AF26B5E84}">
       <p14:sectionLst xmlns:p14="http://schemas.microsoft.com/office/powerpoint/2010/main">
-        <p14:section name="Opening" id="{bda162f8-f712-d451-dbb3-5656a17f406c}">
+        <p14:section name="Opening" id="{f50f3d7d-ce90-9634-961b-f02122174b51}">
           <p14:sldIdLst>
             <p14:sldId id="256"/>
           </p14:sldIdLst>
         </p14:section>
-        <p14:section name="Gate" id="{58da959d-70a5-e831-f7c3-75518fe39e61}">
+        <p14:section name="Gate" id="{26a5e3cc-5837-917e-b7b5-49b5f8ebbb8f}">
           <p14:sldIdLst>
             <p14:sldId id="257"/>
             <p14:sldId id="258"/>
           </p14:sldIdLst>
         </p14:section>
-        <p14:section name="Pre-teach" id="{c73379c1-da38-d79f-d698-822daee97d4e}">
+        <p14:section name="Pre-teach" id="{e9cc8a17-27dc-bcfb-887d-b1ec725a5fa7}">
           <p14:sldIdLst>
             <p14:sldId id="259"/>
           </p14:sldIdLst>
         </p14:section>
-        <p14:section name="Read-along" id="{e3cb56ee-c3f4-1084-2140-8a4665392e3f}">
+        <p14:section name="Read-along" id="{a9a37ef3-8628-ec4f-024b-f9655b4f9654}">
           <p14:sldIdLst>
             <p14:sldId id="260"/>
             <p14:sldId id="261"/>
           </p14:sldIdLst>
         </p14:section>
-        <p14:section name="Teach" id="{757c4834-6fe7-226a-7a86-51b53db7b13a}">
+        <p14:section name="Teach" id="{23c44686-9417-f286-96ce-c8ed37c6712e}">
           <p14:sldIdLst>
             <p14:sldId id="262"/>
             <p14:sldId id="263"/>
@@ -158,7 +158,7 @@
             <p14:sldId id="266"/>
           </p14:sldIdLst>
         </p14:section>
-        <p14:section name="Routes" id="{1d9b84d0-6a5e-de82-4ec9-62df266df2b3}">
+        <p14:section name="Routes" id="{5512a410-abe8-97c9-1e3f-c543e830c278}">
           <p14:sldIdLst>
             <p14:sldId id="267"/>
             <p14:sldId id="268"/>
@@ -168,12 +168,12 @@
             <p14:sldId id="272"/>
           </p14:sldIdLst>
         </p14:section>
-        <p14:section name="Close" id="{4ef962a2-76da-1bfa-5df9-23f395e036a7}">
+        <p14:section name="Close" id="{b4651b50-644f-8e1f-8406-e5cd6b24c0c4}">
           <p14:sldIdLst>
             <p14:sldId id="273"/>
           </p14:sldIdLst>
         </p14:section>
-        <p14:section name="Answers" id="{81b6182a-012c-ade6-7315-c50629180bec}">
+        <p14:section name="Answers" id="{027919e1-4efa-fb1b-e8dc-8fbeae0a8546}">
           <p14:sldIdLst>
             <p14:sldId id="274"/>
             <p14:sldId id="275"/>
@@ -1425,7 +1425,7 @@
               <a:rPr lang="en-US" dirty="0"/>
               <a:t>Exit ticket — individual, silent, on a slip or mini-whiteboard. Recall before help: no notes, no lanes, no hints. Collect before pupils leave.
 Question: What is a tricolon?
-Answer: B   A series of three parallel words, phrases or clauses. Tri means three. A tricolon is three parallel words, phrases or clauses, such as ‘shade, shelter and clean air’.
+Answer: A   A series of three parallel words, phrases or clauses. Tri means three. A tricolon is three parallel words, phrases or clauses, such as ‘shade, shelter and clean air’.
 Source of this question: gate item 1 re-asked (options rotated) — this chapter has no third quick-check module.
 The ebook also holds task 3, "How does the speaker persuade?", for homework or the next lesson's do now.
 Sort the slips: correct → ready to move on; incorrect → start next lesson in the pre-teach group, with the read-along and the Support lane. Same destination next time.</a:t>
@@ -1608,9 +1608,9 @@
             <a:r>
               <a:rPr lang="en-US" dirty="0"/>
               <a:t>Do now — retrieval. Silent, no notes, no help: recall comes before any support. Give about four minutes.
-1. What is a tricolon?  →  C   A series of three parallel words, phrases or clauses
+1. What is a tricolon?  →  B   A series of three parallel words, phrases or clauses
 2. The repetition of a word or phrase at the beginning of several sentences is called ___.  →  anaphora
-3. “So keep the oak.” is an example of which method?  →  A   Imperative
+3. “So keep the oak.” is an example of which method?  →  C   Imperative
 Circulate: who gets 3/3 (Stretch route), 2/3 (Core), 0–1 (Support)? Use this to route pupils later in the lesson.</a:t>
             </a:r>
             <a:endParaRPr lang="en-US" dirty="0"/>
@@ -1791,7 +1791,7 @@
             <a:r>
               <a:rPr lang="en-US" dirty="0"/>
               <a:t>Answers — exit ticket: Exit ticket. Reveal the answer; pupils mark their own work in a different colour, then read the "why" together. Same destination for every lane, so one answer serves the whole class.
-Answer: B   A series of three parallel words, phrases or clauses
+Answer: A   A series of three parallel words, phrases or clauses
 Why: Tri means three. A tricolon is three parallel words, phrases or clauses, such as ‘shade, shelter and clean air’.
 Ask a Support pupil to explain one step, and a Stretch pupil to share their extension.</a:t>
             </a:r>
@@ -1882,9 +1882,9 @@
             <a:r>
               <a:rPr lang="en-US" dirty="0"/>
               <a:t>Answers — pupils mark their own in a different colour, then hands up for 3/3, 2/3, 1/3.
-1. C   A series of three parallel words, phrases or clauses. Tri means three. A tricolon is three parallel words, phrases or clauses, such as ‘shade, shelter and clean air’.
+1. B   A series of three parallel words, phrases or clauses. Tri means three. A tricolon is three parallel words, phrases or clauses, such as ‘shade, shelter and clean air’.
 2. anaphora. Anaphora is repetition at the beginning of sentences or clauses.
-3. A   Imperative. ‘Keep’ is a command verb, so the sentence is an imperative.
+3. C   Imperative. ‘Keep’ is a command verb, so the sentence is an imperative.
 Say the route each score points to: 3/3 Stretch, 2/3 Core, 0–1 Support. Pupils may choose to move up.</a:t>
             </a:r>
             <a:endParaRPr lang="en-US" dirty="0"/>
@@ -8949,7 +8949,7 @@
                 <a:ea typeface="Calibri" pitchFamily="34" charset="-122"/>
                 <a:cs typeface="Calibri" pitchFamily="34" charset="-120"/>
               </a:rPr>
-              <a:t>Maxim and imperative</a:t>
+              <a:t>Analogy and anaphora</a:t>
             </a:r>
             <a:endParaRPr lang="en-US" sz="2600" dirty="0"/>
           </a:p>
@@ -8986,7 +8986,7 @@
                 <a:ea typeface="Calibri" pitchFamily="34" charset="-122"/>
                 <a:cs typeface="Calibri" pitchFamily="34" charset="-120"/>
               </a:rPr>
-              <a:t>Analogy and anaphora</a:t>
+              <a:t>Maxim and imperative</a:t>
             </a:r>
             <a:endParaRPr lang="en-US" sz="2600" dirty="0"/>
           </a:p>
@@ -10353,7 +10353,7 @@
                 <a:ea typeface="Calibri" pitchFamily="34" charset="-122"/>
                 <a:cs typeface="Calibri" pitchFamily="34" charset="-120"/>
               </a:rPr>
-              <a:t>A command</a:t>
+              <a:t>A series of three parallel words, phrases or clauses</a:t>
             </a:r>
             <a:endParaRPr lang="en-US" sz="2400" dirty="0"/>
           </a:p>
@@ -10390,7 +10390,7 @@
                 <a:ea typeface="Calibri" pitchFamily="34" charset="-122"/>
                 <a:cs typeface="Calibri" pitchFamily="34" charset="-120"/>
               </a:rPr>
-              <a:t>A series of three parallel words, phrases or clauses</a:t>
+              <a:t>A command</a:t>
             </a:r>
             <a:endParaRPr lang="en-US" sz="2400" dirty="0"/>
           </a:p>
@@ -11588,7 +11588,7 @@
                 <a:ea typeface="Calibri" pitchFamily="34" charset="-122"/>
                 <a:cs typeface="Calibri" pitchFamily="34" charset="-120"/>
               </a:rPr>
-              <a:t>A command</a:t>
+              <a:t>A series of three parallel words, phrases or clauses</a:t>
             </a:r>
             <a:endParaRPr lang="en-US" sz="2200" dirty="0"/>
           </a:p>
@@ -11625,7 +11625,7 @@
                 <a:ea typeface="Calibri" pitchFamily="34" charset="-122"/>
                 <a:cs typeface="Calibri" pitchFamily="34" charset="-120"/>
               </a:rPr>
-              <a:t>A series of three parallel words, phrases or clauses</a:t>
+              <a:t>A command</a:t>
             </a:r>
             <a:endParaRPr lang="en-US" sz="2200" dirty="0"/>
           </a:p>
@@ -12064,7 +12064,7 @@
                 <a:ea typeface="Calibri" pitchFamily="34" charset="-122"/>
                 <a:cs typeface="Calibri" pitchFamily="34" charset="-120"/>
               </a:rPr>
-              <a:t>Imperative</a:t>
+              <a:t>Maxim</a:t>
             </a:r>
             <a:endParaRPr lang="en-US" sz="2400" dirty="0"/>
           </a:p>
@@ -12101,7 +12101,7 @@
                 <a:ea typeface="Calibri" pitchFamily="34" charset="-122"/>
                 <a:cs typeface="Calibri" pitchFamily="34" charset="-120"/>
               </a:rPr>
-              <a:t>Anecdote</a:t>
+              <a:t>Statistic</a:t>
             </a:r>
             <a:endParaRPr lang="en-US" sz="2400" dirty="0"/>
           </a:p>
@@ -12138,7 +12138,7 @@
                 <a:ea typeface="Calibri" pitchFamily="34" charset="-122"/>
                 <a:cs typeface="Calibri" pitchFamily="34" charset="-120"/>
               </a:rPr>
-              <a:t>Statistic</a:t>
+              <a:t>Imperative</a:t>
             </a:r>
             <a:endParaRPr lang="en-US" sz="2400" dirty="0"/>
           </a:p>
@@ -12175,7 +12175,7 @@
                 <a:ea typeface="Calibri" pitchFamily="34" charset="-122"/>
                 <a:cs typeface="Calibri" pitchFamily="34" charset="-120"/>
               </a:rPr>
-              <a:t>Maxim</a:t>
+              <a:t>Anecdote</a:t>
             </a:r>
             <a:endParaRPr lang="en-US" sz="2400" dirty="0"/>
           </a:p>
@@ -12973,7 +12973,7 @@
                 <a:ea typeface="Cambria" pitchFamily="34" charset="-122"/>
                 <a:cs typeface="Cambria" pitchFamily="34" charset="-120"/>
               </a:rPr>
-              <a:t>B   A series of three parallel words, phrases or clauses</a:t>
+              <a:t>A   A series of three parallel words, phrases or clauses</a:t>
             </a:r>
             <a:endParaRPr lang="en-US" sz="1800" dirty="0"/>
           </a:p>
@@ -13494,7 +13494,7 @@
                 <a:ea typeface="Calibri" pitchFamily="34" charset="-122"/>
                 <a:cs typeface="Calibri" pitchFamily="34" charset="-120"/>
               </a:rPr>
-              <a:t>C   A series of three parallel words, phrases or clauses</a:t>
+              <a:t>B   A series of three parallel words, phrases or clauses</a:t>
             </a:r>
             <a:endParaRPr lang="en-US" sz="2200" dirty="0"/>
           </a:p>
@@ -13994,7 +13994,7 @@
                 <a:ea typeface="Calibri" pitchFamily="34" charset="-122"/>
                 <a:cs typeface="Calibri" pitchFamily="34" charset="-120"/>
               </a:rPr>
-              <a:t>A   Imperative</a:t>
+              <a:t>C   Imperative</a:t>
             </a:r>
             <a:endParaRPr lang="en-US" sz="2200" dirty="0"/>
           </a:p>

--- a/decks/englang-rhetoric/englang-rhetoric_ch3_rhetorical-methods.pptx
+++ b/decks/englang-rhetoric/englang-rhetoric_ch3_rhetorical-methods.pptx
@@ -127,29 +127,29 @@
   <p:extLst>
     <p:ext uri="{521415D9-36F7-43E2-AB2F-B90AF26B5E84}">
       <p14:sectionLst xmlns:p14="http://schemas.microsoft.com/office/powerpoint/2010/main">
-        <p14:section name="Opening" id="{f50f3d7d-ce90-9634-961b-f02122174b51}">
+        <p14:section name="Opening" id="{f6f81e1b-f0f5-8a14-80dc-0c5ad9714e7a}">
           <p14:sldIdLst>
             <p14:sldId id="256"/>
           </p14:sldIdLst>
         </p14:section>
-        <p14:section name="Gate" id="{26a5e3cc-5837-917e-b7b5-49b5f8ebbb8f}">
+        <p14:section name="Gate" id="{b7660276-754c-4a34-6107-f3f33887bdfb}">
           <p14:sldIdLst>
             <p14:sldId id="257"/>
             <p14:sldId id="258"/>
           </p14:sldIdLst>
         </p14:section>
-        <p14:section name="Pre-teach" id="{e9cc8a17-27dc-bcfb-887d-b1ec725a5fa7}">
+        <p14:section name="Pre-teach" id="{6c433560-57d5-eaa4-a33e-d2b63de8e8ed}">
           <p14:sldIdLst>
             <p14:sldId id="259"/>
           </p14:sldIdLst>
         </p14:section>
-        <p14:section name="Read-along" id="{a9a37ef3-8628-ec4f-024b-f9655b4f9654}">
+        <p14:section name="Read-along" id="{929b790f-91fe-59a4-78f2-e812e1293c50}">
           <p14:sldIdLst>
             <p14:sldId id="260"/>
             <p14:sldId id="261"/>
           </p14:sldIdLst>
         </p14:section>
-        <p14:section name="Teach" id="{23c44686-9417-f286-96ce-c8ed37c6712e}">
+        <p14:section name="Teach" id="{97455780-51ca-39f7-3712-5297d7c6a800}">
           <p14:sldIdLst>
             <p14:sldId id="262"/>
             <p14:sldId id="263"/>
@@ -158,7 +158,7 @@
             <p14:sldId id="266"/>
           </p14:sldIdLst>
         </p14:section>
-        <p14:section name="Routes" id="{5512a410-abe8-97c9-1e3f-c543e830c278}">
+        <p14:section name="Routes" id="{5bfd2f49-60df-cd08-c220-61f9dee361ad}">
           <p14:sldIdLst>
             <p14:sldId id="267"/>
             <p14:sldId id="268"/>
@@ -168,12 +168,12 @@
             <p14:sldId id="272"/>
           </p14:sldIdLst>
         </p14:section>
-        <p14:section name="Close" id="{b4651b50-644f-8e1f-8406-e5cd6b24c0c4}">
+        <p14:section name="Close" id="{2d40102b-22a4-704b-e5f0-024715d91c8b}">
           <p14:sldIdLst>
             <p14:sldId id="273"/>
           </p14:sldIdLst>
         </p14:section>
-        <p14:section name="Answers" id="{027919e1-4efa-fb1b-e8dc-8fbeae0a8546}">
+        <p14:section name="Answers" id="{245f6ca9-012b-edeb-33e8-8d7827e811bf}">
           <p14:sldIdLst>
             <p14:sldId id="274"/>
             <p14:sldId id="275"/>
